--- a/Woche_5_Testing_Refactoring/05_Testing_Refactoring_v01.pptx
+++ b/Woche_5_Testing_Refactoring/05_Testing_Refactoring_v01.pptx
@@ -170,14 +170,6 @@
 </p:presentation>
 </file>
 
-<file path=ppt/revisionInfo.xml><?xml version="1.0" encoding="utf-8"?>
-<p1510:revInfo xmlns:a="http://schemas.openxmlformats.org/drawingml/2006/main" xmlns:r="http://schemas.openxmlformats.org/officeDocument/2006/relationships" xmlns:p1510="http://schemas.microsoft.com/office/powerpoint/2015/10/main">
-  <p1510:revLst>
-    <p1510:client id="{7CFDDDDC-E1BA-4098-91F6-EA8D36781B62}" v="26" dt="2026-04-14T11:50:02.639"/>
-  </p1510:revLst>
-</p1510:revInfo>
-</file>
-
 <file path=ppt/changesInfos/changesInfo1.xml><?xml version="1.0" encoding="utf-8"?>
 <pc:chgInfo xmlns:a="http://schemas.openxmlformats.org/drawingml/2006/main" xmlns:r="http://schemas.openxmlformats.org/officeDocument/2006/relationships" xmlns:ac="http://schemas.microsoft.com/office/drawing/2013/main/command" xmlns:pc="http://schemas.microsoft.com/office/powerpoint/2013/main/command">
   <pc:docChgLst>
@@ -217,30 +209,6 @@
             <ac:spMk id="4" creationId="{00000000-0000-0000-0000-000000000000}"/>
           </ac:spMkLst>
         </pc:spChg>
-        <pc:spChg chg="add del mod">
-          <ac:chgData name="Peter Bernhardt" userId="f2333933-0b12-4d6e-972f-f87625423892" providerId="ADAL" clId="{2C628E33-589C-449E-BBA5-ED05E3E5CC01}" dt="2026-04-14T10:30:58.849" v="2459" actId="6264"/>
-          <ac:spMkLst>
-            <pc:docMk/>
-            <pc:sldMk cId="0" sldId="256"/>
-            <ac:spMk id="5" creationId="{8F37EFCA-F3F7-0ADC-42C5-F64CF38DFBDF}"/>
-          </ac:spMkLst>
-        </pc:spChg>
-        <pc:spChg chg="add del mod">
-          <ac:chgData name="Peter Bernhardt" userId="f2333933-0b12-4d6e-972f-f87625423892" providerId="ADAL" clId="{2C628E33-589C-449E-BBA5-ED05E3E5CC01}" dt="2026-04-14T10:30:58.849" v="2459" actId="6264"/>
-          <ac:spMkLst>
-            <pc:docMk/>
-            <pc:sldMk cId="0" sldId="256"/>
-            <ac:spMk id="6" creationId="{4328DDA5-EF52-882F-E9D7-F7D76EFD0AF6}"/>
-          </ac:spMkLst>
-        </pc:spChg>
-        <pc:spChg chg="add del mod">
-          <ac:chgData name="Peter Bernhardt" userId="f2333933-0b12-4d6e-972f-f87625423892" providerId="ADAL" clId="{2C628E33-589C-449E-BBA5-ED05E3E5CC01}" dt="2026-04-14T10:30:58.849" v="2459" actId="6264"/>
-          <ac:spMkLst>
-            <pc:docMk/>
-            <pc:sldMk cId="0" sldId="256"/>
-            <ac:spMk id="7" creationId="{106D87BE-CB5A-1C27-4D2E-75B111785C54}"/>
-          </ac:spMkLst>
-        </pc:spChg>
       </pc:sldChg>
       <pc:sldChg chg="addSp delSp modSp add del mod chgLayout">
         <pc:chgData name="Peter Bernhardt" userId="f2333933-0b12-4d6e-972f-f87625423892" providerId="ADAL" clId="{2C628E33-589C-449E-BBA5-ED05E3E5CC01}" dt="2026-04-14T10:31:18.153" v="2493" actId="20577"/>
@@ -254,14 +222,6 @@
             <pc:docMk/>
             <pc:sldMk cId="0" sldId="257"/>
             <ac:spMk id="2" creationId="{00000000-0000-0000-0000-000000000000}"/>
-          </ac:spMkLst>
-        </pc:spChg>
-        <pc:spChg chg="add del mod">
-          <ac:chgData name="Peter Bernhardt" userId="f2333933-0b12-4d6e-972f-f87625423892" providerId="ADAL" clId="{2C628E33-589C-449E-BBA5-ED05E3E5CC01}" dt="2026-04-14T10:31:11.325" v="2489" actId="6264"/>
-          <ac:spMkLst>
-            <pc:docMk/>
-            <pc:sldMk cId="0" sldId="257"/>
-            <ac:spMk id="3" creationId="{98782434-AC96-673D-D42B-D3C7626D1936}"/>
           </ac:spMkLst>
         </pc:spChg>
         <pc:spChg chg="add mod ord">
@@ -345,14 +305,6 @@
             <pc:docMk/>
             <pc:sldMk cId="0" sldId="262"/>
             <ac:spMk id="2" creationId="{00000000-0000-0000-0000-000000000000}"/>
-          </ac:spMkLst>
-        </pc:spChg>
-        <pc:spChg chg="add del mod">
-          <ac:chgData name="Peter Bernhardt" userId="f2333933-0b12-4d6e-972f-f87625423892" providerId="ADAL" clId="{2C628E33-589C-449E-BBA5-ED05E3E5CC01}" dt="2026-04-14T10:34:11.288" v="2569" actId="6264"/>
-          <ac:spMkLst>
-            <pc:docMk/>
-            <pc:sldMk cId="0" sldId="262"/>
-            <ac:spMk id="3" creationId="{5E8FF9F6-37CA-1F1E-849D-A59EC6BA29A9}"/>
           </ac:spMkLst>
         </pc:spChg>
         <pc:spChg chg="add mod ord">
@@ -554,14 +506,6 @@
             <ac:spMk id="2" creationId="{00000000-0000-0000-0000-000000000000}"/>
           </ac:spMkLst>
         </pc:spChg>
-        <pc:spChg chg="add del mod">
-          <ac:chgData name="Peter Bernhardt" userId="f2333933-0b12-4d6e-972f-f87625423892" providerId="ADAL" clId="{2C628E33-589C-449E-BBA5-ED05E3E5CC01}" dt="2026-04-14T11:04:15.133" v="3165" actId="6264"/>
-          <ac:spMkLst>
-            <pc:docMk/>
-            <pc:sldMk cId="0" sldId="271"/>
-            <ac:spMk id="3" creationId="{FFCE3172-29A9-4DE8-CBC1-008C8043E259}"/>
-          </ac:spMkLst>
-        </pc:spChg>
         <pc:spChg chg="add mod ord">
           <ac:chgData name="Peter Bernhardt" userId="f2333933-0b12-4d6e-972f-f87625423892" providerId="ADAL" clId="{2C628E33-589C-449E-BBA5-ED05E3E5CC01}" dt="2026-04-14T11:04:15.133" v="3165" actId="6264"/>
           <ac:spMkLst>
@@ -715,14 +659,6 @@
             <ac:spMk id="2" creationId="{00000000-0000-0000-0000-000000000000}"/>
           </ac:spMkLst>
         </pc:spChg>
-        <pc:spChg chg="add del mod">
-          <ac:chgData name="Peter Bernhardt" userId="f2333933-0b12-4d6e-972f-f87625423892" providerId="ADAL" clId="{2C628E33-589C-449E-BBA5-ED05E3E5CC01}" dt="2026-04-14T11:33:53.553" v="3642" actId="6264"/>
-          <ac:spMkLst>
-            <pc:docMk/>
-            <pc:sldMk cId="0" sldId="278"/>
-            <ac:spMk id="3" creationId="{3AF0EE87-A11A-52C2-A98C-F962ED2F8679}"/>
-          </ac:spMkLst>
-        </pc:spChg>
         <pc:spChg chg="add mod ord">
           <ac:chgData name="Peter Bernhardt" userId="f2333933-0b12-4d6e-972f-f87625423892" providerId="ADAL" clId="{2C628E33-589C-449E-BBA5-ED05E3E5CC01}" dt="2026-04-14T11:33:53.553" v="3642" actId="6264"/>
           <ac:spMkLst>
@@ -860,14 +796,6 @@
             <ac:spMk id="2" creationId="{00000000-0000-0000-0000-000000000000}"/>
           </ac:spMkLst>
         </pc:spChg>
-        <pc:spChg chg="add del mod">
-          <ac:chgData name="Peter Bernhardt" userId="f2333933-0b12-4d6e-972f-f87625423892" providerId="ADAL" clId="{2C628E33-589C-449E-BBA5-ED05E3E5CC01}" dt="2026-04-14T11:47:29.562" v="3817" actId="6264"/>
-          <ac:spMkLst>
-            <pc:docMk/>
-            <pc:sldMk cId="0" sldId="285"/>
-            <ac:spMk id="3" creationId="{B3C45268-8C53-6DB0-2CE9-051474E77D47}"/>
-          </ac:spMkLst>
-        </pc:spChg>
         <pc:spChg chg="add mod ord">
           <ac:chgData name="Peter Bernhardt" userId="f2333933-0b12-4d6e-972f-f87625423892" providerId="ADAL" clId="{2C628E33-589C-449E-BBA5-ED05E3E5CC01}" dt="2026-04-14T11:47:29.562" v="3817" actId="6264"/>
           <ac:spMkLst>
@@ -959,14 +887,6 @@
             <ac:spMk id="2" creationId="{00000000-0000-0000-0000-000000000000}"/>
           </ac:spMkLst>
         </pc:spChg>
-        <pc:spChg chg="add del mod">
-          <ac:chgData name="Peter Bernhardt" userId="f2333933-0b12-4d6e-972f-f87625423892" providerId="ADAL" clId="{2C628E33-589C-449E-BBA5-ED05E3E5CC01}" dt="2026-04-14T11:53:22.906" v="3941" actId="6264"/>
-          <ac:spMkLst>
-            <pc:docMk/>
-            <pc:sldMk cId="0" sldId="290"/>
-            <ac:spMk id="3" creationId="{581098E9-8DBA-99B3-83FE-BFCFFB078CAF}"/>
-          </ac:spMkLst>
-        </pc:spChg>
         <pc:spChg chg="add mod ord">
           <ac:chgData name="Peter Bernhardt" userId="f2333933-0b12-4d6e-972f-f87625423892" providerId="ADAL" clId="{2C628E33-589C-449E-BBA5-ED05E3E5CC01}" dt="2026-04-14T11:53:22.906" v="3941" actId="6264"/>
           <ac:spMkLst>
@@ -1005,13 +925,6 @@
             <ac:spMk id="3" creationId="{00000000-0000-0000-0000-000000000000}"/>
           </ac:spMkLst>
         </pc:spChg>
-      </pc:sldChg>
-      <pc:sldChg chg="add del">
-        <pc:chgData name="Peter Bernhardt" userId="f2333933-0b12-4d6e-972f-f87625423892" providerId="ADAL" clId="{2C628E33-589C-449E-BBA5-ED05E3E5CC01}" dt="2026-04-14T11:00:11.345" v="3135" actId="47"/>
-        <pc:sldMkLst>
-          <pc:docMk/>
-          <pc:sldMk cId="1963320349" sldId="293"/>
-        </pc:sldMkLst>
       </pc:sldChg>
       <pc:sldChg chg="modSp add mod">
         <pc:chgData name="Peter Bernhardt" userId="f2333933-0b12-4d6e-972f-f87625423892" providerId="ADAL" clId="{2C628E33-589C-449E-BBA5-ED05E3E5CC01}" dt="2026-04-14T10:59:55.067" v="3134" actId="20577"/>
@@ -1128,468 +1041,6 @@
           </ac:spMkLst>
         </pc:spChg>
       </pc:sldChg>
-      <pc:sldChg chg="modSp add del mod">
-        <pc:chgData name="Peter Bernhardt" userId="f2333933-0b12-4d6e-972f-f87625423892" providerId="ADAL" clId="{2C628E33-589C-449E-BBA5-ED05E3E5CC01}" dt="2026-04-14T10:30:56.143" v="2458" actId="47"/>
-        <pc:sldMkLst>
-          <pc:docMk/>
-          <pc:sldMk cId="828059843" sldId="299"/>
-        </pc:sldMkLst>
-      </pc:sldChg>
-      <pc:sldChg chg="addSp delSp modSp add del mod chgLayout">
-        <pc:chgData name="Peter Bernhardt" userId="f2333933-0b12-4d6e-972f-f87625423892" providerId="ADAL" clId="{2C628E33-589C-449E-BBA5-ED05E3E5CC01}" dt="2026-04-14T10:30:56.143" v="2458" actId="47"/>
-        <pc:sldMkLst>
-          <pc:docMk/>
-          <pc:sldMk cId="0" sldId="312"/>
-        </pc:sldMkLst>
-      </pc:sldChg>
-      <pc:sldChg chg="addSp delSp modSp add del mod chgLayout">
-        <pc:chgData name="Peter Bernhardt" userId="f2333933-0b12-4d6e-972f-f87625423892" providerId="ADAL" clId="{2C628E33-589C-449E-BBA5-ED05E3E5CC01}" dt="2026-04-14T10:30:56.143" v="2458" actId="47"/>
-        <pc:sldMkLst>
-          <pc:docMk/>
-          <pc:sldMk cId="0" sldId="313"/>
-        </pc:sldMkLst>
-      </pc:sldChg>
-      <pc:sldChg chg="addSp delSp modSp add del mod chgLayout">
-        <pc:chgData name="Peter Bernhardt" userId="f2333933-0b12-4d6e-972f-f87625423892" providerId="ADAL" clId="{2C628E33-589C-449E-BBA5-ED05E3E5CC01}" dt="2026-04-14T10:30:56.143" v="2458" actId="47"/>
-        <pc:sldMkLst>
-          <pc:docMk/>
-          <pc:sldMk cId="0" sldId="314"/>
-        </pc:sldMkLst>
-      </pc:sldChg>
-      <pc:sldChg chg="addSp delSp modSp add del mod chgLayout">
-        <pc:chgData name="Peter Bernhardt" userId="f2333933-0b12-4d6e-972f-f87625423892" providerId="ADAL" clId="{2C628E33-589C-449E-BBA5-ED05E3E5CC01}" dt="2026-04-14T10:30:56.143" v="2458" actId="47"/>
-        <pc:sldMkLst>
-          <pc:docMk/>
-          <pc:sldMk cId="0" sldId="315"/>
-        </pc:sldMkLst>
-      </pc:sldChg>
-      <pc:sldChg chg="addSp delSp modSp add del mod chgLayout">
-        <pc:chgData name="Peter Bernhardt" userId="f2333933-0b12-4d6e-972f-f87625423892" providerId="ADAL" clId="{2C628E33-589C-449E-BBA5-ED05E3E5CC01}" dt="2026-04-14T10:30:56.143" v="2458" actId="47"/>
-        <pc:sldMkLst>
-          <pc:docMk/>
-          <pc:sldMk cId="0" sldId="316"/>
-        </pc:sldMkLst>
-      </pc:sldChg>
-      <pc:sldChg chg="addSp delSp modSp add del mod chgLayout">
-        <pc:chgData name="Peter Bernhardt" userId="f2333933-0b12-4d6e-972f-f87625423892" providerId="ADAL" clId="{2C628E33-589C-449E-BBA5-ED05E3E5CC01}" dt="2026-04-14T10:30:56.143" v="2458" actId="47"/>
-        <pc:sldMkLst>
-          <pc:docMk/>
-          <pc:sldMk cId="0" sldId="317"/>
-        </pc:sldMkLst>
-      </pc:sldChg>
-      <pc:sldChg chg="addSp delSp modSp add del mod chgLayout">
-        <pc:chgData name="Peter Bernhardt" userId="f2333933-0b12-4d6e-972f-f87625423892" providerId="ADAL" clId="{2C628E33-589C-449E-BBA5-ED05E3E5CC01}" dt="2026-04-14T10:30:56.143" v="2458" actId="47"/>
-        <pc:sldMkLst>
-          <pc:docMk/>
-          <pc:sldMk cId="0" sldId="318"/>
-        </pc:sldMkLst>
-      </pc:sldChg>
-      <pc:sldChg chg="modSp add del mod">
-        <pc:chgData name="Peter Bernhardt" userId="f2333933-0b12-4d6e-972f-f87625423892" providerId="ADAL" clId="{2C628E33-589C-449E-BBA5-ED05E3E5CC01}" dt="2026-04-14T10:30:56.143" v="2458" actId="47"/>
-        <pc:sldMkLst>
-          <pc:docMk/>
-          <pc:sldMk cId="0" sldId="319"/>
-        </pc:sldMkLst>
-      </pc:sldChg>
-      <pc:sldChg chg="modSp add del mod">
-        <pc:chgData name="Peter Bernhardt" userId="f2333933-0b12-4d6e-972f-f87625423892" providerId="ADAL" clId="{2C628E33-589C-449E-BBA5-ED05E3E5CC01}" dt="2026-04-14T10:30:56.143" v="2458" actId="47"/>
-        <pc:sldMkLst>
-          <pc:docMk/>
-          <pc:sldMk cId="0" sldId="320"/>
-        </pc:sldMkLst>
-      </pc:sldChg>
-      <pc:sldChg chg="addSp delSp modSp add del mod">
-        <pc:chgData name="Peter Bernhardt" userId="f2333933-0b12-4d6e-972f-f87625423892" providerId="ADAL" clId="{2C628E33-589C-449E-BBA5-ED05E3E5CC01}" dt="2026-04-14T10:30:56.143" v="2458" actId="47"/>
-        <pc:sldMkLst>
-          <pc:docMk/>
-          <pc:sldMk cId="0" sldId="321"/>
-        </pc:sldMkLst>
-      </pc:sldChg>
-      <pc:sldChg chg="addSp modSp add del mod">
-        <pc:chgData name="Peter Bernhardt" userId="f2333933-0b12-4d6e-972f-f87625423892" providerId="ADAL" clId="{2C628E33-589C-449E-BBA5-ED05E3E5CC01}" dt="2026-04-14T10:30:56.143" v="2458" actId="47"/>
-        <pc:sldMkLst>
-          <pc:docMk/>
-          <pc:sldMk cId="0" sldId="322"/>
-        </pc:sldMkLst>
-      </pc:sldChg>
-      <pc:sldChg chg="addSp modSp add del mod">
-        <pc:chgData name="Peter Bernhardt" userId="f2333933-0b12-4d6e-972f-f87625423892" providerId="ADAL" clId="{2C628E33-589C-449E-BBA5-ED05E3E5CC01}" dt="2026-04-14T10:30:56.143" v="2458" actId="47"/>
-        <pc:sldMkLst>
-          <pc:docMk/>
-          <pc:sldMk cId="0" sldId="323"/>
-        </pc:sldMkLst>
-      </pc:sldChg>
-      <pc:sldChg chg="add del">
-        <pc:chgData name="Peter Bernhardt" userId="f2333933-0b12-4d6e-972f-f87625423892" providerId="ADAL" clId="{2C628E33-589C-449E-BBA5-ED05E3E5CC01}" dt="2026-04-14T10:30:56.143" v="2458" actId="47"/>
-        <pc:sldMkLst>
-          <pc:docMk/>
-          <pc:sldMk cId="0" sldId="324"/>
-        </pc:sldMkLst>
-      </pc:sldChg>
-      <pc:sldChg chg="addSp delSp modSp add del mod chgLayout">
-        <pc:chgData name="Peter Bernhardt" userId="f2333933-0b12-4d6e-972f-f87625423892" providerId="ADAL" clId="{2C628E33-589C-449E-BBA5-ED05E3E5CC01}" dt="2026-04-14T10:30:56.143" v="2458" actId="47"/>
-        <pc:sldMkLst>
-          <pc:docMk/>
-          <pc:sldMk cId="0" sldId="325"/>
-        </pc:sldMkLst>
-      </pc:sldChg>
-      <pc:sldChg chg="modSp add del mod">
-        <pc:chgData name="Peter Bernhardt" userId="f2333933-0b12-4d6e-972f-f87625423892" providerId="ADAL" clId="{2C628E33-589C-449E-BBA5-ED05E3E5CC01}" dt="2026-04-14T10:30:56.143" v="2458" actId="47"/>
-        <pc:sldMkLst>
-          <pc:docMk/>
-          <pc:sldMk cId="0" sldId="326"/>
-        </pc:sldMkLst>
-      </pc:sldChg>
-      <pc:sldChg chg="modSp add del mod">
-        <pc:chgData name="Peter Bernhardt" userId="f2333933-0b12-4d6e-972f-f87625423892" providerId="ADAL" clId="{2C628E33-589C-449E-BBA5-ED05E3E5CC01}" dt="2026-04-14T10:30:56.143" v="2458" actId="47"/>
-        <pc:sldMkLst>
-          <pc:docMk/>
-          <pc:sldMk cId="0" sldId="327"/>
-        </pc:sldMkLst>
-      </pc:sldChg>
-      <pc:sldChg chg="addSp delSp modSp add del mod chgLayout">
-        <pc:chgData name="Peter Bernhardt" userId="f2333933-0b12-4d6e-972f-f87625423892" providerId="ADAL" clId="{2C628E33-589C-449E-BBA5-ED05E3E5CC01}" dt="2026-04-14T10:30:56.143" v="2458" actId="47"/>
-        <pc:sldMkLst>
-          <pc:docMk/>
-          <pc:sldMk cId="0" sldId="329"/>
-        </pc:sldMkLst>
-      </pc:sldChg>
-      <pc:sldChg chg="modSp add del mod">
-        <pc:chgData name="Peter Bernhardt" userId="f2333933-0b12-4d6e-972f-f87625423892" providerId="ADAL" clId="{2C628E33-589C-449E-BBA5-ED05E3E5CC01}" dt="2026-04-14T10:30:56.143" v="2458" actId="47"/>
-        <pc:sldMkLst>
-          <pc:docMk/>
-          <pc:sldMk cId="0" sldId="330"/>
-        </pc:sldMkLst>
-      </pc:sldChg>
-      <pc:sldChg chg="addSp modSp add del mod">
-        <pc:chgData name="Peter Bernhardt" userId="f2333933-0b12-4d6e-972f-f87625423892" providerId="ADAL" clId="{2C628E33-589C-449E-BBA5-ED05E3E5CC01}" dt="2026-04-14T10:30:56.143" v="2458" actId="47"/>
-        <pc:sldMkLst>
-          <pc:docMk/>
-          <pc:sldMk cId="0" sldId="331"/>
-        </pc:sldMkLst>
-      </pc:sldChg>
-      <pc:sldChg chg="modSp add del mod">
-        <pc:chgData name="Peter Bernhardt" userId="f2333933-0b12-4d6e-972f-f87625423892" providerId="ADAL" clId="{2C628E33-589C-449E-BBA5-ED05E3E5CC01}" dt="2026-04-14T10:30:56.143" v="2458" actId="47"/>
-        <pc:sldMkLst>
-          <pc:docMk/>
-          <pc:sldMk cId="0" sldId="332"/>
-        </pc:sldMkLst>
-      </pc:sldChg>
-      <pc:sldChg chg="addSp delSp modSp add del mod chgLayout">
-        <pc:chgData name="Peter Bernhardt" userId="f2333933-0b12-4d6e-972f-f87625423892" providerId="ADAL" clId="{2C628E33-589C-449E-BBA5-ED05E3E5CC01}" dt="2026-04-14T10:30:56.143" v="2458" actId="47"/>
-        <pc:sldMkLst>
-          <pc:docMk/>
-          <pc:sldMk cId="0" sldId="333"/>
-        </pc:sldMkLst>
-      </pc:sldChg>
-      <pc:sldChg chg="modSp add del mod">
-        <pc:chgData name="Peter Bernhardt" userId="f2333933-0b12-4d6e-972f-f87625423892" providerId="ADAL" clId="{2C628E33-589C-449E-BBA5-ED05E3E5CC01}" dt="2026-04-14T10:30:56.143" v="2458" actId="47"/>
-        <pc:sldMkLst>
-          <pc:docMk/>
-          <pc:sldMk cId="0" sldId="334"/>
-        </pc:sldMkLst>
-      </pc:sldChg>
-      <pc:sldChg chg="modSp add del mod">
-        <pc:chgData name="Peter Bernhardt" userId="f2333933-0b12-4d6e-972f-f87625423892" providerId="ADAL" clId="{2C628E33-589C-449E-BBA5-ED05E3E5CC01}" dt="2026-04-14T10:30:56.143" v="2458" actId="47"/>
-        <pc:sldMkLst>
-          <pc:docMk/>
-          <pc:sldMk cId="0" sldId="335"/>
-        </pc:sldMkLst>
-      </pc:sldChg>
-      <pc:sldChg chg="modSp add del mod">
-        <pc:chgData name="Peter Bernhardt" userId="f2333933-0b12-4d6e-972f-f87625423892" providerId="ADAL" clId="{2C628E33-589C-449E-BBA5-ED05E3E5CC01}" dt="2026-04-14T10:30:56.143" v="2458" actId="47"/>
-        <pc:sldMkLst>
-          <pc:docMk/>
-          <pc:sldMk cId="0" sldId="336"/>
-        </pc:sldMkLst>
-      </pc:sldChg>
-      <pc:sldChg chg="addSp modSp add del mod">
-        <pc:chgData name="Peter Bernhardt" userId="f2333933-0b12-4d6e-972f-f87625423892" providerId="ADAL" clId="{2C628E33-589C-449E-BBA5-ED05E3E5CC01}" dt="2026-04-14T10:30:56.143" v="2458" actId="47"/>
-        <pc:sldMkLst>
-          <pc:docMk/>
-          <pc:sldMk cId="0" sldId="337"/>
-        </pc:sldMkLst>
-      </pc:sldChg>
-      <pc:sldChg chg="addSp delSp modSp add del mod chgLayout">
-        <pc:chgData name="Peter Bernhardt" userId="f2333933-0b12-4d6e-972f-f87625423892" providerId="ADAL" clId="{2C628E33-589C-449E-BBA5-ED05E3E5CC01}" dt="2026-04-14T10:30:56.143" v="2458" actId="47"/>
-        <pc:sldMkLst>
-          <pc:docMk/>
-          <pc:sldMk cId="0" sldId="338"/>
-        </pc:sldMkLst>
-      </pc:sldChg>
-      <pc:sldChg chg="modSp add del mod">
-        <pc:chgData name="Peter Bernhardt" userId="f2333933-0b12-4d6e-972f-f87625423892" providerId="ADAL" clId="{2C628E33-589C-449E-BBA5-ED05E3E5CC01}" dt="2026-04-14T10:30:56.143" v="2458" actId="47"/>
-        <pc:sldMkLst>
-          <pc:docMk/>
-          <pc:sldMk cId="0" sldId="339"/>
-        </pc:sldMkLst>
-      </pc:sldChg>
-      <pc:sldChg chg="modSp add del mod">
-        <pc:chgData name="Peter Bernhardt" userId="f2333933-0b12-4d6e-972f-f87625423892" providerId="ADAL" clId="{2C628E33-589C-449E-BBA5-ED05E3E5CC01}" dt="2026-04-14T10:30:56.143" v="2458" actId="47"/>
-        <pc:sldMkLst>
-          <pc:docMk/>
-          <pc:sldMk cId="0" sldId="340"/>
-        </pc:sldMkLst>
-      </pc:sldChg>
-      <pc:sldChg chg="addSp delSp modSp add del mod chgLayout">
-        <pc:chgData name="Peter Bernhardt" userId="f2333933-0b12-4d6e-972f-f87625423892" providerId="ADAL" clId="{2C628E33-589C-449E-BBA5-ED05E3E5CC01}" dt="2026-04-14T10:30:56.143" v="2458" actId="47"/>
-        <pc:sldMkLst>
-          <pc:docMk/>
-          <pc:sldMk cId="0" sldId="341"/>
-        </pc:sldMkLst>
-      </pc:sldChg>
-      <pc:sldChg chg="modSp add del mod">
-        <pc:chgData name="Peter Bernhardt" userId="f2333933-0b12-4d6e-972f-f87625423892" providerId="ADAL" clId="{2C628E33-589C-449E-BBA5-ED05E3E5CC01}" dt="2026-04-14T10:30:56.143" v="2458" actId="47"/>
-        <pc:sldMkLst>
-          <pc:docMk/>
-          <pc:sldMk cId="0" sldId="342"/>
-        </pc:sldMkLst>
-      </pc:sldChg>
-      <pc:sldChg chg="modSp add del mod">
-        <pc:chgData name="Peter Bernhardt" userId="f2333933-0b12-4d6e-972f-f87625423892" providerId="ADAL" clId="{2C628E33-589C-449E-BBA5-ED05E3E5CC01}" dt="2026-04-14T10:30:56.143" v="2458" actId="47"/>
-        <pc:sldMkLst>
-          <pc:docMk/>
-          <pc:sldMk cId="0" sldId="343"/>
-        </pc:sldMkLst>
-      </pc:sldChg>
-      <pc:sldChg chg="addSp modSp add del mod">
-        <pc:chgData name="Peter Bernhardt" userId="f2333933-0b12-4d6e-972f-f87625423892" providerId="ADAL" clId="{2C628E33-589C-449E-BBA5-ED05E3E5CC01}" dt="2026-04-14T10:30:56.143" v="2458" actId="47"/>
-        <pc:sldMkLst>
-          <pc:docMk/>
-          <pc:sldMk cId="0" sldId="345"/>
-        </pc:sldMkLst>
-      </pc:sldChg>
-      <pc:sldChg chg="modSp add del mod">
-        <pc:chgData name="Peter Bernhardt" userId="f2333933-0b12-4d6e-972f-f87625423892" providerId="ADAL" clId="{2C628E33-589C-449E-BBA5-ED05E3E5CC01}" dt="2026-04-14T10:30:56.143" v="2458" actId="47"/>
-        <pc:sldMkLst>
-          <pc:docMk/>
-          <pc:sldMk cId="0" sldId="346"/>
-        </pc:sldMkLst>
-      </pc:sldChg>
-      <pc:sldChg chg="addSp modSp add del mod">
-        <pc:chgData name="Peter Bernhardt" userId="f2333933-0b12-4d6e-972f-f87625423892" providerId="ADAL" clId="{2C628E33-589C-449E-BBA5-ED05E3E5CC01}" dt="2026-04-14T10:30:56.143" v="2458" actId="47"/>
-        <pc:sldMkLst>
-          <pc:docMk/>
-          <pc:sldMk cId="0" sldId="348"/>
-        </pc:sldMkLst>
-      </pc:sldChg>
-      <pc:sldChg chg="addSp modSp add del mod">
-        <pc:chgData name="Peter Bernhardt" userId="f2333933-0b12-4d6e-972f-f87625423892" providerId="ADAL" clId="{2C628E33-589C-449E-BBA5-ED05E3E5CC01}" dt="2026-04-14T10:30:56.143" v="2458" actId="47"/>
-        <pc:sldMkLst>
-          <pc:docMk/>
-          <pc:sldMk cId="0" sldId="349"/>
-        </pc:sldMkLst>
-      </pc:sldChg>
-      <pc:sldChg chg="addSp modSp add del mod">
-        <pc:chgData name="Peter Bernhardt" userId="f2333933-0b12-4d6e-972f-f87625423892" providerId="ADAL" clId="{2C628E33-589C-449E-BBA5-ED05E3E5CC01}" dt="2026-04-14T10:30:56.143" v="2458" actId="47"/>
-        <pc:sldMkLst>
-          <pc:docMk/>
-          <pc:sldMk cId="0" sldId="350"/>
-        </pc:sldMkLst>
-      </pc:sldChg>
-      <pc:sldChg chg="modSp add del mod">
-        <pc:chgData name="Peter Bernhardt" userId="f2333933-0b12-4d6e-972f-f87625423892" providerId="ADAL" clId="{2C628E33-589C-449E-BBA5-ED05E3E5CC01}" dt="2026-04-14T10:30:56.143" v="2458" actId="47"/>
-        <pc:sldMkLst>
-          <pc:docMk/>
-          <pc:sldMk cId="0" sldId="351"/>
-        </pc:sldMkLst>
-      </pc:sldChg>
-      <pc:sldChg chg="modSp add del mod">
-        <pc:chgData name="Peter Bernhardt" userId="f2333933-0b12-4d6e-972f-f87625423892" providerId="ADAL" clId="{2C628E33-589C-449E-BBA5-ED05E3E5CC01}" dt="2026-04-14T10:30:56.143" v="2458" actId="47"/>
-        <pc:sldMkLst>
-          <pc:docMk/>
-          <pc:sldMk cId="0" sldId="352"/>
-        </pc:sldMkLst>
-      </pc:sldChg>
-      <pc:sldChg chg="addSp modSp add del mod">
-        <pc:chgData name="Peter Bernhardt" userId="f2333933-0b12-4d6e-972f-f87625423892" providerId="ADAL" clId="{2C628E33-589C-449E-BBA5-ED05E3E5CC01}" dt="2026-04-14T10:30:56.143" v="2458" actId="47"/>
-        <pc:sldMkLst>
-          <pc:docMk/>
-          <pc:sldMk cId="0" sldId="353"/>
-        </pc:sldMkLst>
-      </pc:sldChg>
-      <pc:sldChg chg="modSp add del mod">
-        <pc:chgData name="Peter Bernhardt" userId="f2333933-0b12-4d6e-972f-f87625423892" providerId="ADAL" clId="{2C628E33-589C-449E-BBA5-ED05E3E5CC01}" dt="2026-04-14T10:30:56.143" v="2458" actId="47"/>
-        <pc:sldMkLst>
-          <pc:docMk/>
-          <pc:sldMk cId="0" sldId="354"/>
-        </pc:sldMkLst>
-      </pc:sldChg>
-      <pc:sldChg chg="modSp add del mod ord">
-        <pc:chgData name="Peter Bernhardt" userId="f2333933-0b12-4d6e-972f-f87625423892" providerId="ADAL" clId="{2C628E33-589C-449E-BBA5-ED05E3E5CC01}" dt="2026-04-14T10:30:56.143" v="2458" actId="47"/>
-        <pc:sldMkLst>
-          <pc:docMk/>
-          <pc:sldMk cId="3006067673" sldId="355"/>
-        </pc:sldMkLst>
-      </pc:sldChg>
-      <pc:sldChg chg="addSp delSp modSp add del mod modClrScheme chgLayout">
-        <pc:chgData name="Peter Bernhardt" userId="f2333933-0b12-4d6e-972f-f87625423892" providerId="ADAL" clId="{2C628E33-589C-449E-BBA5-ED05E3E5CC01}" dt="2026-04-14T10:30:56.143" v="2458" actId="47"/>
-        <pc:sldMkLst>
-          <pc:docMk/>
-          <pc:sldMk cId="4226888076" sldId="356"/>
-        </pc:sldMkLst>
-      </pc:sldChg>
-      <pc:sldChg chg="addSp modSp add del mod">
-        <pc:chgData name="Peter Bernhardt" userId="f2333933-0b12-4d6e-972f-f87625423892" providerId="ADAL" clId="{2C628E33-589C-449E-BBA5-ED05E3E5CC01}" dt="2026-04-14T10:30:56.143" v="2458" actId="47"/>
-        <pc:sldMkLst>
-          <pc:docMk/>
-          <pc:sldMk cId="4004808998" sldId="357"/>
-        </pc:sldMkLst>
-      </pc:sldChg>
-      <pc:sldChg chg="addSp delSp modSp add del mod">
-        <pc:chgData name="Peter Bernhardt" userId="f2333933-0b12-4d6e-972f-f87625423892" providerId="ADAL" clId="{2C628E33-589C-449E-BBA5-ED05E3E5CC01}" dt="2026-04-14T10:30:56.143" v="2458" actId="47"/>
-        <pc:sldMkLst>
-          <pc:docMk/>
-          <pc:sldMk cId="1525301068" sldId="358"/>
-        </pc:sldMkLst>
-      </pc:sldChg>
-      <pc:sldChg chg="addSp modSp add del mod">
-        <pc:chgData name="Peter Bernhardt" userId="f2333933-0b12-4d6e-972f-f87625423892" providerId="ADAL" clId="{2C628E33-589C-449E-BBA5-ED05E3E5CC01}" dt="2026-04-14T10:30:56.143" v="2458" actId="47"/>
-        <pc:sldMkLst>
-          <pc:docMk/>
-          <pc:sldMk cId="4114000533" sldId="359"/>
-        </pc:sldMkLst>
-      </pc:sldChg>
-      <pc:sldChg chg="addSp delSp modSp add del mod modClrScheme chgLayout">
-        <pc:chgData name="Peter Bernhardt" userId="f2333933-0b12-4d6e-972f-f87625423892" providerId="ADAL" clId="{2C628E33-589C-449E-BBA5-ED05E3E5CC01}" dt="2026-04-14T10:30:56.143" v="2458" actId="47"/>
-        <pc:sldMkLst>
-          <pc:docMk/>
-          <pc:sldMk cId="238115033" sldId="360"/>
-        </pc:sldMkLst>
-      </pc:sldChg>
-      <pc:sldChg chg="modSp add del mod">
-        <pc:chgData name="Peter Bernhardt" userId="f2333933-0b12-4d6e-972f-f87625423892" providerId="ADAL" clId="{2C628E33-589C-449E-BBA5-ED05E3E5CC01}" dt="2026-04-14T10:30:56.143" v="2458" actId="47"/>
-        <pc:sldMkLst>
-          <pc:docMk/>
-          <pc:sldMk cId="2092670350" sldId="361"/>
-        </pc:sldMkLst>
-      </pc:sldChg>
-      <pc:sldChg chg="modSp add del mod">
-        <pc:chgData name="Peter Bernhardt" userId="f2333933-0b12-4d6e-972f-f87625423892" providerId="ADAL" clId="{2C628E33-589C-449E-BBA5-ED05E3E5CC01}" dt="2026-04-14T10:30:56.143" v="2458" actId="47"/>
-        <pc:sldMkLst>
-          <pc:docMk/>
-          <pc:sldMk cId="3773495373" sldId="362"/>
-        </pc:sldMkLst>
-      </pc:sldChg>
-      <pc:sldChg chg="addSp modSp add del mod">
-        <pc:chgData name="Peter Bernhardt" userId="f2333933-0b12-4d6e-972f-f87625423892" providerId="ADAL" clId="{2C628E33-589C-449E-BBA5-ED05E3E5CC01}" dt="2026-04-14T10:30:56.143" v="2458" actId="47"/>
-        <pc:sldMkLst>
-          <pc:docMk/>
-          <pc:sldMk cId="3743550707" sldId="363"/>
-        </pc:sldMkLst>
-      </pc:sldChg>
-      <pc:sldChg chg="modSp add del mod">
-        <pc:chgData name="Peter Bernhardt" userId="f2333933-0b12-4d6e-972f-f87625423892" providerId="ADAL" clId="{2C628E33-589C-449E-BBA5-ED05E3E5CC01}" dt="2026-04-14T10:30:56.143" v="2458" actId="47"/>
-        <pc:sldMkLst>
-          <pc:docMk/>
-          <pc:sldMk cId="3919368777" sldId="364"/>
-        </pc:sldMkLst>
-      </pc:sldChg>
-      <pc:sldChg chg="modSp add del mod">
-        <pc:chgData name="Peter Bernhardt" userId="f2333933-0b12-4d6e-972f-f87625423892" providerId="ADAL" clId="{2C628E33-589C-449E-BBA5-ED05E3E5CC01}" dt="2026-04-14T10:30:56.143" v="2458" actId="47"/>
-        <pc:sldMkLst>
-          <pc:docMk/>
-          <pc:sldMk cId="3168071334" sldId="365"/>
-        </pc:sldMkLst>
-      </pc:sldChg>
-      <pc:sldChg chg="addSp delSp modSp add del mod chgLayout">
-        <pc:chgData name="Peter Bernhardt" userId="f2333933-0b12-4d6e-972f-f87625423892" providerId="ADAL" clId="{2C628E33-589C-449E-BBA5-ED05E3E5CC01}" dt="2026-04-14T10:30:56.143" v="2458" actId="47"/>
-        <pc:sldMkLst>
-          <pc:docMk/>
-          <pc:sldMk cId="0" sldId="366"/>
-        </pc:sldMkLst>
-      </pc:sldChg>
-      <pc:sldChg chg="modSp add del mod">
-        <pc:chgData name="Peter Bernhardt" userId="f2333933-0b12-4d6e-972f-f87625423892" providerId="ADAL" clId="{2C628E33-589C-449E-BBA5-ED05E3E5CC01}" dt="2026-04-14T10:30:56.143" v="2458" actId="47"/>
-        <pc:sldMkLst>
-          <pc:docMk/>
-          <pc:sldMk cId="0" sldId="367"/>
-        </pc:sldMkLst>
-      </pc:sldChg>
-      <pc:sldChg chg="modSp add del mod">
-        <pc:chgData name="Peter Bernhardt" userId="f2333933-0b12-4d6e-972f-f87625423892" providerId="ADAL" clId="{2C628E33-589C-449E-BBA5-ED05E3E5CC01}" dt="2026-04-14T10:30:56.143" v="2458" actId="47"/>
-        <pc:sldMkLst>
-          <pc:docMk/>
-          <pc:sldMk cId="0" sldId="368"/>
-        </pc:sldMkLst>
-      </pc:sldChg>
-      <pc:sldChg chg="addSp modSp add del mod">
-        <pc:chgData name="Peter Bernhardt" userId="f2333933-0b12-4d6e-972f-f87625423892" providerId="ADAL" clId="{2C628E33-589C-449E-BBA5-ED05E3E5CC01}" dt="2026-04-14T10:30:56.143" v="2458" actId="47"/>
-        <pc:sldMkLst>
-          <pc:docMk/>
-          <pc:sldMk cId="3665968777" sldId="369"/>
-        </pc:sldMkLst>
-      </pc:sldChg>
-      <pc:sldChg chg="addSp modSp add del mod">
-        <pc:chgData name="Peter Bernhardt" userId="f2333933-0b12-4d6e-972f-f87625423892" providerId="ADAL" clId="{2C628E33-589C-449E-BBA5-ED05E3E5CC01}" dt="2026-04-14T10:30:56.143" v="2458" actId="47"/>
-        <pc:sldMkLst>
-          <pc:docMk/>
-          <pc:sldMk cId="3045014799" sldId="370"/>
-        </pc:sldMkLst>
-      </pc:sldChg>
-      <pc:sldChg chg="addSp modSp add del mod">
-        <pc:chgData name="Peter Bernhardt" userId="f2333933-0b12-4d6e-972f-f87625423892" providerId="ADAL" clId="{2C628E33-589C-449E-BBA5-ED05E3E5CC01}" dt="2026-04-14T10:30:56.143" v="2458" actId="47"/>
-        <pc:sldMkLst>
-          <pc:docMk/>
-          <pc:sldMk cId="2531980179" sldId="371"/>
-        </pc:sldMkLst>
-      </pc:sldChg>
-      <pc:sldChg chg="addSp delSp modSp add del mod">
-        <pc:chgData name="Peter Bernhardt" userId="f2333933-0b12-4d6e-972f-f87625423892" providerId="ADAL" clId="{2C628E33-589C-449E-BBA5-ED05E3E5CC01}" dt="2026-04-14T10:30:56.143" v="2458" actId="47"/>
-        <pc:sldMkLst>
-          <pc:docMk/>
-          <pc:sldMk cId="438181561" sldId="372"/>
-        </pc:sldMkLst>
-      </pc:sldChg>
-      <pc:sldChg chg="addSp delSp modSp add del mod">
-        <pc:chgData name="Peter Bernhardt" userId="f2333933-0b12-4d6e-972f-f87625423892" providerId="ADAL" clId="{2C628E33-589C-449E-BBA5-ED05E3E5CC01}" dt="2026-04-14T10:30:56.143" v="2458" actId="47"/>
-        <pc:sldMkLst>
-          <pc:docMk/>
-          <pc:sldMk cId="1938612766" sldId="373"/>
-        </pc:sldMkLst>
-      </pc:sldChg>
-      <pc:sldChg chg="addSp delSp modSp add del mod">
-        <pc:chgData name="Peter Bernhardt" userId="f2333933-0b12-4d6e-972f-f87625423892" providerId="ADAL" clId="{2C628E33-589C-449E-BBA5-ED05E3E5CC01}" dt="2026-04-14T10:30:56.143" v="2458" actId="47"/>
-        <pc:sldMkLst>
-          <pc:docMk/>
-          <pc:sldMk cId="919481187" sldId="374"/>
-        </pc:sldMkLst>
-      </pc:sldChg>
-      <pc:sldChg chg="addSp delSp modSp add del mod">
-        <pc:chgData name="Peter Bernhardt" userId="f2333933-0b12-4d6e-972f-f87625423892" providerId="ADAL" clId="{2C628E33-589C-449E-BBA5-ED05E3E5CC01}" dt="2026-04-14T10:30:56.143" v="2458" actId="47"/>
-        <pc:sldMkLst>
-          <pc:docMk/>
-          <pc:sldMk cId="1572494066" sldId="375"/>
-        </pc:sldMkLst>
-      </pc:sldChg>
-      <pc:sldChg chg="add del">
-        <pc:chgData name="Peter Bernhardt" userId="f2333933-0b12-4d6e-972f-f87625423892" providerId="ADAL" clId="{2C628E33-589C-449E-BBA5-ED05E3E5CC01}" dt="2026-04-14T10:30:56.143" v="2458" actId="47"/>
-        <pc:sldMkLst>
-          <pc:docMk/>
-          <pc:sldMk cId="3095075784" sldId="376"/>
-        </pc:sldMkLst>
-      </pc:sldChg>
-      <pc:sldChg chg="addSp delSp modSp add del mod">
-        <pc:chgData name="Peter Bernhardt" userId="f2333933-0b12-4d6e-972f-f87625423892" providerId="ADAL" clId="{2C628E33-589C-449E-BBA5-ED05E3E5CC01}" dt="2026-04-14T10:30:56.143" v="2458" actId="47"/>
-        <pc:sldMkLst>
-          <pc:docMk/>
-          <pc:sldMk cId="4157354045" sldId="377"/>
-        </pc:sldMkLst>
-      </pc:sldChg>
-      <pc:sldChg chg="addSp delSp modSp add del mod">
-        <pc:chgData name="Peter Bernhardt" userId="f2333933-0b12-4d6e-972f-f87625423892" providerId="ADAL" clId="{2C628E33-589C-449E-BBA5-ED05E3E5CC01}" dt="2026-04-14T10:30:56.143" v="2458" actId="47"/>
-        <pc:sldMkLst>
-          <pc:docMk/>
-          <pc:sldMk cId="2279425259" sldId="378"/>
-        </pc:sldMkLst>
-      </pc:sldChg>
-      <pc:sldChg chg="addSp delSp modSp add del mod ord">
-        <pc:chgData name="Peter Bernhardt" userId="f2333933-0b12-4d6e-972f-f87625423892" providerId="ADAL" clId="{2C628E33-589C-449E-BBA5-ED05E3E5CC01}" dt="2026-04-14T10:30:56.143" v="2458" actId="47"/>
-        <pc:sldMkLst>
-          <pc:docMk/>
-          <pc:sldMk cId="1419412194" sldId="379"/>
-        </pc:sldMkLst>
-      </pc:sldChg>
     </pc:docChg>
   </pc:docChgLst>
   <pc:docChgLst>
@@ -1695,10 +1146,25 @@
   <pc:docChgLst>
     <pc:chgData name="Peter Bernhardt" userId="f2333933-0b12-4d6e-972f-f87625423892" providerId="ADAL" clId="{34DA1458-4058-4912-885C-C6A06A12728D}"/>
     <pc:docChg chg="custSel modSld">
-      <pc:chgData name="Peter Bernhardt" userId="f2333933-0b12-4d6e-972f-f87625423892" providerId="ADAL" clId="{34DA1458-4058-4912-885C-C6A06A12728D}" dt="2026-04-09T15:27:31.406" v="185"/>
+      <pc:chgData name="Peter Bernhardt" userId="f2333933-0b12-4d6e-972f-f87625423892" providerId="ADAL" clId="{34DA1458-4058-4912-885C-C6A06A12728D}" dt="2026-04-16T12:56:16.756" v="187" actId="20577"/>
       <pc:docMkLst>
         <pc:docMk/>
       </pc:docMkLst>
+      <pc:sldChg chg="modSp mod">
+        <pc:chgData name="Peter Bernhardt" userId="f2333933-0b12-4d6e-972f-f87625423892" providerId="ADAL" clId="{34DA1458-4058-4912-885C-C6A06A12728D}" dt="2026-04-16T12:56:16.756" v="187" actId="20577"/>
+        <pc:sldMkLst>
+          <pc:docMk/>
+          <pc:sldMk cId="0" sldId="256"/>
+        </pc:sldMkLst>
+        <pc:spChg chg="mod">
+          <ac:chgData name="Peter Bernhardt" userId="f2333933-0b12-4d6e-972f-f87625423892" providerId="ADAL" clId="{34DA1458-4058-4912-885C-C6A06A12728D}" dt="2026-04-16T12:56:16.756" v="187" actId="20577"/>
+          <ac:spMkLst>
+            <pc:docMk/>
+            <pc:sldMk cId="0" sldId="256"/>
+            <ac:spMk id="2" creationId="{00000000-0000-0000-0000-000000000000}"/>
+          </ac:spMkLst>
+        </pc:spChg>
+      </pc:sldChg>
     </pc:docChg>
   </pc:docChgLst>
 </pc:chgInfo>
@@ -4856,7 +4322,7 @@
           <a:p>
             <a:fld id="{241EB5C9-1307-BA42-ABA2-0BC069CD8E7F}" type="datetimeFigureOut">
               <a:rPr lang="en-US" smtClean="0"/>
-              <a:t>4/14/2026</a:t>
+              <a:t>4/16/2026</a:t>
             </a:fld>
             <a:endParaRPr lang="en-US"/>
           </a:p>
@@ -5064,7 +4530,7 @@
           <a:p>
             <a:fld id="{241EB5C9-1307-BA42-ABA2-0BC069CD8E7F}" type="datetimeFigureOut">
               <a:rPr lang="en-US" smtClean="0"/>
-              <a:t>4/14/2026</a:t>
+              <a:t>4/16/2026</a:t>
             </a:fld>
             <a:endParaRPr lang="en-US"/>
           </a:p>
@@ -5320,7 +4786,7 @@
           <a:p>
             <a:fld id="{241EB5C9-1307-BA42-ABA2-0BC069CD8E7F}" type="datetimeFigureOut">
               <a:rPr lang="en-US" smtClean="0"/>
-              <a:t>4/14/2026</a:t>
+              <a:t>4/16/2026</a:t>
             </a:fld>
             <a:endParaRPr lang="en-US"/>
           </a:p>
@@ -5508,7 +4974,7 @@
           <a:p>
             <a:fld id="{241EB5C9-1307-BA42-ABA2-0BC069CD8E7F}" type="datetimeFigureOut">
               <a:rPr lang="en-US" smtClean="0"/>
-              <a:t>4/14/2026</a:t>
+              <a:t>4/16/2026</a:t>
             </a:fld>
             <a:endParaRPr lang="en-US"/>
           </a:p>
@@ -5865,7 +5331,7 @@
           <a:p>
             <a:fld id="{241EB5C9-1307-BA42-ABA2-0BC069CD8E7F}" type="datetimeFigureOut">
               <a:rPr lang="en-US" smtClean="0"/>
-              <a:t>4/14/2026</a:t>
+              <a:t>4/16/2026</a:t>
             </a:fld>
             <a:endParaRPr lang="en-US"/>
           </a:p>
@@ -6140,7 +5606,7 @@
           <a:p>
             <a:fld id="{241EB5C9-1307-BA42-ABA2-0BC069CD8E7F}" type="datetimeFigureOut">
               <a:rPr lang="en-US" smtClean="0"/>
-              <a:t>4/14/2026</a:t>
+              <a:t>4/16/2026</a:t>
             </a:fld>
             <a:endParaRPr lang="en-US"/>
           </a:p>
@@ -6519,7 +5985,7 @@
           <a:p>
             <a:fld id="{241EB5C9-1307-BA42-ABA2-0BC069CD8E7F}" type="datetimeFigureOut">
               <a:rPr lang="en-US" smtClean="0"/>
-              <a:t>4/14/2026</a:t>
+              <a:t>4/16/2026</a:t>
             </a:fld>
             <a:endParaRPr lang="en-US"/>
           </a:p>
@@ -6637,7 +6103,7 @@
           <a:p>
             <a:fld id="{241EB5C9-1307-BA42-ABA2-0BC069CD8E7F}" type="datetimeFigureOut">
               <a:rPr lang="en-US" smtClean="0"/>
-              <a:t>4/14/2026</a:t>
+              <a:t>4/16/2026</a:t>
             </a:fld>
             <a:endParaRPr lang="en-US"/>
           </a:p>
@@ -6808,7 +6274,7 @@
           <a:p>
             <a:fld id="{241EB5C9-1307-BA42-ABA2-0BC069CD8E7F}" type="datetimeFigureOut">
               <a:rPr lang="en-US" smtClean="0"/>
-              <a:t>4/14/2026</a:t>
+              <a:t>4/16/2026</a:t>
             </a:fld>
             <a:endParaRPr lang="en-US"/>
           </a:p>
@@ -7176,7 +6642,7 @@
           <a:p>
             <a:fld id="{241EB5C9-1307-BA42-ABA2-0BC069CD8E7F}" type="datetimeFigureOut">
               <a:rPr lang="en-US" smtClean="0"/>
-              <a:t>4/14/2026</a:t>
+              <a:t>4/16/2026</a:t>
             </a:fld>
             <a:endParaRPr lang="en-US"/>
           </a:p>
@@ -7553,7 +7019,7 @@
           <a:p>
             <a:fld id="{241EB5C9-1307-BA42-ABA2-0BC069CD8E7F}" type="datetimeFigureOut">
               <a:rPr lang="en-US" smtClean="0"/>
-              <a:t>4/14/2026</a:t>
+              <a:t>4/16/2026</a:t>
             </a:fld>
             <a:endParaRPr lang="en-US"/>
           </a:p>
@@ -7854,7 +7320,7 @@
           <a:p>
             <a:fld id="{241EB5C9-1307-BA42-ABA2-0BC069CD8E7F}" type="datetimeFigureOut">
               <a:rPr lang="en-US" smtClean="0"/>
-              <a:t>4/14/2026</a:t>
+              <a:t>4/16/2026</a:t>
             </a:fld>
             <a:endParaRPr lang="en-US"/>
           </a:p>
